--- a/apps/resources/bundled_files/6-klass-bolchok-kobeytuu-boluu-sabak.pptx
+++ b/apps/resources/bundled_files/6-klass-bolchok-kobeytuu-boluu-sabak.pptx
@@ -5196,7 +5196,7 @@
                 </a:solidFill>
                 <a:latin typeface="PT Sans"/>
               </a:rPr>
-              <a:t>6-класс · Математика</a:t>
+              <a:t/>
             </a:r>
           </a:p>
         </p:txBody>
@@ -5688,7 +5688,7 @@
                 </a:solidFill>
                 <a:latin typeface="PT Sans"/>
               </a:rPr>
-              <a:t>6-класс ›</a:t>
+              <a:t/>
             </a:r>
           </a:p>
           <a:p>
@@ -6637,7 +6637,7 @@
                 </a:solidFill>
                 <a:latin typeface="PT Sans"/>
               </a:rPr>
-              <a:t>6-класс ›</a:t>
+              <a:t/>
             </a:r>
           </a:p>
           <a:p>
@@ -9902,7 +9902,7 @@
                 </a:solidFill>
                 <a:latin typeface="PT Sans"/>
               </a:rPr>
-              <a:t>6-класс ›</a:t>
+              <a:t/>
             </a:r>
           </a:p>
           <a:p>
@@ -12616,7 +12616,7 @@
                 </a:solidFill>
                 <a:latin typeface="PT Sans"/>
               </a:rPr>
-              <a:t>6-класс ›</a:t>
+              <a:t/>
             </a:r>
           </a:p>
           <a:p>
@@ -14199,7 +14199,7 @@
                 </a:solidFill>
                 <a:latin typeface="PT Sans"/>
               </a:rPr>
-              <a:t>6-класс ›</a:t>
+              <a:t/>
             </a:r>
           </a:p>
           <a:p>
@@ -14989,7 +14989,7 @@
                 </a:solidFill>
                 <a:latin typeface="PT Sans"/>
               </a:rPr>
-              <a:t>6-класс ›</a:t>
+              <a:t/>
             </a:r>
           </a:p>
           <a:p>
@@ -15740,7 +15740,7 @@
                 </a:solidFill>
                 <a:latin typeface="PT Sans"/>
               </a:rPr>
-              <a:t>6-класс ›</a:t>
+              <a:t/>
             </a:r>
           </a:p>
           <a:p>
@@ -17406,7 +17406,7 @@
                 </a:solidFill>
                 <a:latin typeface="PT Sans"/>
               </a:rPr>
-              <a:t>6-класс ›</a:t>
+              <a:t/>
             </a:r>
           </a:p>
           <a:p>
@@ -18490,7 +18490,7 @@
                 </a:solidFill>
                 <a:latin typeface="PT Sans"/>
               </a:rPr>
-              <a:t>6-класс ›</a:t>
+              <a:t/>
             </a:r>
           </a:p>
           <a:p>
@@ -20020,7 +20020,7 @@
                 </a:solidFill>
                 <a:latin typeface="PT Sans"/>
               </a:rPr>
-              <a:t>6-класс ›</a:t>
+              <a:t/>
             </a:r>
           </a:p>
           <a:p>
@@ -22141,7 +22141,7 @@
                 </a:solidFill>
                 <a:latin typeface="PT Sans"/>
               </a:rPr>
-              <a:t>6-класс ›</a:t>
+              <a:t/>
             </a:r>
           </a:p>
           <a:p>
@@ -23418,7 +23418,7 @@
                 </a:solidFill>
                 <a:latin typeface="PT Sans"/>
               </a:rPr>
-              <a:t>6-класс ›</a:t>
+              <a:t/>
             </a:r>
           </a:p>
           <a:p>
@@ -24846,7 +24846,7 @@
                 </a:solidFill>
                 <a:latin typeface="PT Sans"/>
               </a:rPr>
-              <a:t>6-класс ›</a:t>
+              <a:t/>
             </a:r>
           </a:p>
           <a:p>
@@ -26302,7 +26302,7 @@
                 </a:solidFill>
                 <a:latin typeface="PT Sans"/>
               </a:rPr>
-              <a:t>6-класс ›</a:t>
+              <a:t/>
             </a:r>
           </a:p>
           <a:p>
@@ -27708,7 +27708,7 @@
                 </a:solidFill>
                 <a:latin typeface="PT Sans"/>
               </a:rPr>
-              <a:t>6-класс ›</a:t>
+              <a:t/>
             </a:r>
           </a:p>
           <a:p>
@@ -28508,7 +28508,7 @@
                 </a:solidFill>
                 <a:latin typeface="PT Sans"/>
               </a:rPr>
-              <a:t>6-класс ›</a:t>
+              <a:t/>
             </a:r>
           </a:p>
           <a:p>
@@ -29349,7 +29349,7 @@
                 </a:solidFill>
                 <a:latin typeface="PT Sans"/>
               </a:rPr>
-              <a:t>6-класс ›</a:t>
+              <a:t/>
             </a:r>
           </a:p>
           <a:p>
@@ -30298,7 +30298,7 @@
                 </a:solidFill>
                 <a:latin typeface="PT Sans"/>
               </a:rPr>
-              <a:t>6-класс ›</a:t>
+              <a:t/>
             </a:r>
           </a:p>
           <a:p>
@@ -31752,7 +31752,7 @@
                 </a:solidFill>
                 <a:latin typeface="PT Sans"/>
               </a:rPr>
-              <a:t>6-класс ›</a:t>
+              <a:t/>
             </a:r>
           </a:p>
           <a:p>
@@ -32498,7 +32498,7 @@
                 </a:solidFill>
                 <a:latin typeface="PT Sans"/>
               </a:rPr>
-              <a:t>6-класс ›</a:t>
+              <a:t/>
             </a:r>
           </a:p>
           <a:p>
@@ -33306,7 +33306,7 @@
                 </a:solidFill>
                 <a:latin typeface="PT Sans"/>
               </a:rPr>
-              <a:t>6-класс ›</a:t>
+              <a:t/>
             </a:r>
           </a:p>
           <a:p>
@@ -34497,7 +34497,7 @@
                 </a:solidFill>
                 <a:latin typeface="PT Sans"/>
               </a:rPr>
-              <a:t>6-класс ›</a:t>
+              <a:t/>
             </a:r>
           </a:p>
           <a:p>
@@ -35676,7 +35676,7 @@
                 </a:solidFill>
                 <a:latin typeface="PT Sans"/>
               </a:rPr>
-              <a:t>6-класс ›</a:t>
+              <a:t/>
             </a:r>
           </a:p>
           <a:p>
@@ -35857,7 +35857,7 @@
                 </a:solidFill>
                 <a:latin typeface="PT Sans"/>
               </a:rPr>
-              <a:t>4-класс</a:t>
+              <a:t/>
             </a:r>
           </a:p>
         </p:txBody>
@@ -36037,7 +36037,7 @@
                 </a:solidFill>
                 <a:latin typeface="PT Sans"/>
               </a:rPr>
-              <a:t>5-класс</a:t>
+              <a:t/>
             </a:r>
           </a:p>
         </p:txBody>
@@ -36217,7 +36217,7 @@
                 </a:solidFill>
                 <a:latin typeface="PT Sans"/>
               </a:rPr>
-              <a:t>6-класс</a:t>
+              <a:t/>
             </a:r>
           </a:p>
         </p:txBody>
@@ -36453,7 +36453,7 @@
                 </a:solidFill>
                 <a:latin typeface="PT Sans"/>
               </a:rPr>
-              <a:t>7-класс</a:t>
+              <a:t/>
             </a:r>
           </a:p>
         </p:txBody>
@@ -36873,7 +36873,7 @@
                 </a:solidFill>
                 <a:latin typeface="PT Sans"/>
               </a:rPr>
-              <a:t>6-класс ›</a:t>
+              <a:t/>
             </a:r>
           </a:p>
           <a:p>
@@ -38021,7 +38021,7 @@
                 </a:solidFill>
                 <a:latin typeface="PT Sans"/>
               </a:rPr>
-              <a:t>6-класс ›</a:t>
+              <a:t/>
             </a:r>
           </a:p>
           <a:p>

--- a/apps/resources/bundled_files/6-klass-bolchok-kobeytuu-boluu-sabak.pptx
+++ b/apps/resources/bundled_files/6-klass-bolchok-kobeytuu-boluu-sabak.pptx
@@ -1582,7 +1582,7 @@
           <a:lstStyle/>
           <a:p>
             <a:r>
-              <a:t>Ой жүгүртүү маданияты (Wenxi Lee, 2.6).</a:t>
+              <a:t>Ой жүгүртүү маданияты (Wenxi Lee, 2,6).</a:t>
             </a:r>
           </a:p>
         </p:txBody>
